--- a/Lectures/Lecture14-UnderstandingModels.pptx
+++ b/Lectures/Lecture14-UnderstandingModels.pptx
@@ -9,30 +9,33 @@
   </p:notesMasterIdLst>
   <p:sldIdLst>
     <p:sldId id="256" r:id="rId2"/>
-    <p:sldId id="510" r:id="rId3"/>
-    <p:sldId id="323" r:id="rId4"/>
-    <p:sldId id="524" r:id="rId5"/>
-    <p:sldId id="263" r:id="rId6"/>
-    <p:sldId id="500" r:id="rId7"/>
-    <p:sldId id="525" r:id="rId8"/>
-    <p:sldId id="501" r:id="rId9"/>
-    <p:sldId id="502" r:id="rId10"/>
-    <p:sldId id="503" r:id="rId11"/>
-    <p:sldId id="505" r:id="rId12"/>
-    <p:sldId id="506" r:id="rId13"/>
-    <p:sldId id="507" r:id="rId14"/>
-    <p:sldId id="508" r:id="rId15"/>
-    <p:sldId id="509" r:id="rId16"/>
-    <p:sldId id="511" r:id="rId17"/>
-    <p:sldId id="504" r:id="rId18"/>
-    <p:sldId id="521" r:id="rId19"/>
-    <p:sldId id="513" r:id="rId20"/>
-    <p:sldId id="520" r:id="rId21"/>
-    <p:sldId id="522" r:id="rId22"/>
+    <p:sldId id="323" r:id="rId3"/>
+    <p:sldId id="526" r:id="rId4"/>
+    <p:sldId id="527" r:id="rId5"/>
+    <p:sldId id="524" r:id="rId6"/>
+    <p:sldId id="263" r:id="rId7"/>
+    <p:sldId id="500" r:id="rId8"/>
+    <p:sldId id="525" r:id="rId9"/>
+    <p:sldId id="501" r:id="rId10"/>
+    <p:sldId id="502" r:id="rId11"/>
+    <p:sldId id="503" r:id="rId12"/>
+    <p:sldId id="505" r:id="rId13"/>
+    <p:sldId id="506" r:id="rId14"/>
+    <p:sldId id="507" r:id="rId15"/>
+    <p:sldId id="508" r:id="rId16"/>
+    <p:sldId id="509" r:id="rId17"/>
+    <p:sldId id="511" r:id="rId18"/>
+    <p:sldId id="504" r:id="rId19"/>
+    <p:sldId id="521" r:id="rId20"/>
+    <p:sldId id="513" r:id="rId21"/>
+    <p:sldId id="520" r:id="rId22"/>
     <p:sldId id="498" r:id="rId23"/>
   </p:sldIdLst>
   <p:sldSz cx="12192000" cy="6858000"/>
   <p:notesSz cx="6858000" cy="9144000"/>
+  <p:custDataLst>
+    <p:tags r:id="rId25"/>
+  </p:custDataLst>
   <p:defaultTextStyle>
     <a:defPPr marR="0" lvl="0" algn="l" rtl="0">
       <a:lnSpc>
@@ -267,7 +270,7 @@
       <p15:sldGuideLst xmlns:p15="http://schemas.microsoft.com/office/powerpoint/2012/main"/>
     </p:ext>
     <p:ext uri="http://customooxmlschemas.google.com/">
-      <go:slidesCustomData xmlns="" xmlns:mc="http://schemas.openxmlformats.org/markup-compatibility/2006" xmlns:mv="urn:schemas-microsoft-com:mac:vml" xmlns:c="http://schemas.openxmlformats.org/drawingml/2006/chart" xmlns:dgm="http://schemas.openxmlformats.org/drawingml/2006/diagram" xmlns:o="urn:schemas-microsoft-com:office:office" xmlns:v="urn:schemas-microsoft-com:vml" xmlns:pvml="urn:schemas-microsoft-com:office:powerpoint" xmlns:com="http://schemas.openxmlformats.org/drawingml/2006/compatibility" xmlns:p14="http://schemas.microsoft.com/office/powerpoint/2010/main" xmlns:p15="http://schemas.microsoft.com/office/powerpoint/2012/main" xmlns:go="http://customooxmlschemas.google.com/" r:id="rId32" roundtripDataSignature="AMtx7mhE+28Dr6x2pr2JNXfuZKhsL7KtRg=="/>
+      <go:slidesCustomData xmlns:go="http://customooxmlschemas.google.com/" xmlns:p15="http://schemas.microsoft.com/office/powerpoint/2012/main" xmlns:p14="http://schemas.microsoft.com/office/powerpoint/2010/main" xmlns:com="http://schemas.openxmlformats.org/drawingml/2006/compatibility" xmlns:pvml="urn:schemas-microsoft-com:office:powerpoint" xmlns:v="urn:schemas-microsoft-com:vml" xmlns:o="urn:schemas-microsoft-com:office:office" xmlns:dgm="http://schemas.openxmlformats.org/drawingml/2006/diagram" xmlns:c="http://schemas.openxmlformats.org/drawingml/2006/chart" xmlns:mv="urn:schemas-microsoft-com:mac:vml" xmlns:mc="http://schemas.openxmlformats.org/markup-compatibility/2006" xmlns="" r:id="rId32" roundtripDataSignature="AMtx7mhE+28Dr6x2pr2JNXfuZKhsL7KtRg=="/>
     </p:ext>
   </p:extLst>
 </p:presentation>
@@ -7426,7 +7429,7 @@
             </a:pPr>
             <a:fld id="{00000000-1234-1234-1234-123412341234}" type="slidenum">
               <a:rPr lang="en-US"/>
-              <a:t>17</a:t>
+              <a:t>18</a:t>
             </a:fld>
             <a:endParaRPr/>
           </a:p>
@@ -7582,7 +7585,7 @@
             </a:pPr>
             <a:fld id="{00000000-1234-1234-1234-123412341234}" type="slidenum">
               <a:rPr lang="en-US"/>
-              <a:t>18</a:t>
+              <a:t>19</a:t>
             </a:fld>
             <a:endParaRPr/>
           </a:p>
@@ -7810,162 +7813,6 @@
     <p:extLst>
       <p:ext uri="{BB962C8B-B14F-4D97-AF65-F5344CB8AC3E}">
         <p14:creationId xmlns:p14="http://schemas.microsoft.com/office/powerpoint/2010/main" val="1584103305"/>
-      </p:ext>
-    </p:extLst>
-  </p:cSld>
-  <p:clrMapOvr>
-    <a:masterClrMapping/>
-  </p:clrMapOvr>
-</p:notes>
-</file>
-
-<file path=ppt/notesSlides/notesSlide18.xml><?xml version="1.0" encoding="utf-8"?>
-<p:notes xmlns:a="http://schemas.openxmlformats.org/drawingml/2006/main" xmlns:r="http://schemas.openxmlformats.org/officeDocument/2006/relationships" xmlns:p="http://schemas.openxmlformats.org/presentationml/2006/main" showMasterSp="0" showMasterPhAnim="0">
-  <p:cSld>
-    <p:spTree>
-      <p:nvGrpSpPr>
-        <p:cNvPr id="1" name="Shape 116"/>
-        <p:cNvGrpSpPr/>
-        <p:nvPr/>
-      </p:nvGrpSpPr>
-      <p:grpSpPr>
-        <a:xfrm>
-          <a:off x="0" y="0"/>
-          <a:ext cx="0" cy="0"/>
-          <a:chOff x="0" y="0"/>
-          <a:chExt cx="0" cy="0"/>
-        </a:xfrm>
-      </p:grpSpPr>
-      <p:sp>
-        <p:nvSpPr>
-          <p:cNvPr id="117" name="Google Shape;117;g71c382910d_0_6:notes"/>
-          <p:cNvSpPr>
-            <a:spLocks noGrp="1" noRot="1" noChangeAspect="1"/>
-          </p:cNvSpPr>
-          <p:nvPr>
-            <p:ph type="sldImg" idx="2"/>
-          </p:nvPr>
-        </p:nvSpPr>
-        <p:spPr>
-          <a:xfrm>
-            <a:off x="685800" y="1143000"/>
-            <a:ext cx="5486400" cy="3086100"/>
-          </a:xfrm>
-          <a:custGeom>
-            <a:avLst/>
-            <a:gdLst/>
-            <a:ahLst/>
-            <a:cxnLst/>
-            <a:rect l="l" t="t" r="r" b="b"/>
-            <a:pathLst>
-              <a:path w="120000" h="120000" extrusionOk="0">
-                <a:moveTo>
-                  <a:pt x="0" y="0"/>
-                </a:moveTo>
-                <a:lnTo>
-                  <a:pt x="120000" y="0"/>
-                </a:lnTo>
-                <a:lnTo>
-                  <a:pt x="120000" y="120000"/>
-                </a:lnTo>
-                <a:lnTo>
-                  <a:pt x="0" y="120000"/>
-                </a:lnTo>
-                <a:close/>
-              </a:path>
-            </a:pathLst>
-          </a:custGeom>
-        </p:spPr>
-      </p:sp>
-      <p:sp>
-        <p:nvSpPr>
-          <p:cNvPr id="118" name="Google Shape;118;g71c382910d_0_6:notes"/>
-          <p:cNvSpPr txBox="1">
-            <a:spLocks noGrp="1"/>
-          </p:cNvSpPr>
-          <p:nvPr>
-            <p:ph type="body" idx="1"/>
-          </p:nvPr>
-        </p:nvSpPr>
-        <p:spPr>
-          <a:xfrm>
-            <a:off x="685800" y="4400550"/>
-            <a:ext cx="5486400" cy="3600600"/>
-          </a:xfrm>
-          <a:prstGeom prst="rect">
-            <a:avLst/>
-          </a:prstGeom>
-        </p:spPr>
-        <p:txBody>
-          <a:bodyPr spcFirstLastPara="1" wrap="square" lIns="91425" tIns="45700" rIns="91425" bIns="45700" anchor="t" anchorCtr="0">
-            <a:noAutofit/>
-          </a:bodyPr>
-          <a:lstStyle/>
-          <a:p>
-            <a:pPr marL="0" lvl="0" indent="0" algn="l" rtl="0">
-              <a:spcBef>
-                <a:spcPts val="0"/>
-              </a:spcBef>
-              <a:spcAft>
-                <a:spcPts val="0"/>
-              </a:spcAft>
-              <a:buNone/>
-            </a:pPr>
-            <a:endParaRPr/>
-          </a:p>
-        </p:txBody>
-      </p:sp>
-      <p:sp>
-        <p:nvSpPr>
-          <p:cNvPr id="119" name="Google Shape;119;g71c382910d_0_6:notes"/>
-          <p:cNvSpPr txBox="1">
-            <a:spLocks noGrp="1"/>
-          </p:cNvSpPr>
-          <p:nvPr>
-            <p:ph type="sldNum" idx="12"/>
-          </p:nvPr>
-        </p:nvSpPr>
-        <p:spPr>
-          <a:xfrm>
-            <a:off x="3884613" y="8685213"/>
-            <a:ext cx="2971800" cy="458700"/>
-          </a:xfrm>
-          <a:prstGeom prst="rect">
-            <a:avLst/>
-          </a:prstGeom>
-        </p:spPr>
-        <p:txBody>
-          <a:bodyPr spcFirstLastPara="1" wrap="square" lIns="91425" tIns="45700" rIns="91425" bIns="45700" anchor="b" anchorCtr="0">
-            <a:noAutofit/>
-          </a:bodyPr>
-          <a:lstStyle/>
-          <a:p>
-            <a:pPr marL="0" lvl="0" indent="0" algn="r" rtl="0">
-              <a:spcBef>
-                <a:spcPts val="0"/>
-              </a:spcBef>
-              <a:spcAft>
-                <a:spcPts val="0"/>
-              </a:spcAft>
-              <a:buClr>
-                <a:srgbClr val="000000"/>
-              </a:buClr>
-              <a:buSzPts val="1200"/>
-              <a:buFont typeface="Arial"/>
-              <a:buNone/>
-            </a:pPr>
-            <a:fld id="{00000000-1234-1234-1234-123412341234}" type="slidenum">
-              <a:rPr lang="en-US"/>
-              <a:t>21</a:t>
-            </a:fld>
-            <a:endParaRPr/>
-          </a:p>
-        </p:txBody>
-      </p:sp>
-    </p:spTree>
-    <p:extLst>
-      <p:ext uri="{BB962C8B-B14F-4D97-AF65-F5344CB8AC3E}">
-        <p14:creationId xmlns:p14="http://schemas.microsoft.com/office/powerpoint/2010/main" val="2611662736"/>
       </p:ext>
     </p:extLst>
   </p:cSld>
@@ -8434,7 +8281,7 @@
             </a:pPr>
             <a:fld id="{00000000-1234-1234-1234-123412341234}" type="slidenum">
               <a:rPr lang="en-US"/>
-              <a:t>7</a:t>
+              <a:t>8</a:t>
             </a:fld>
             <a:endParaRPr/>
           </a:p>
@@ -8699,7 +8546,7 @@
             </a:pPr>
             <a:fld id="{00000000-1234-1234-1234-123412341234}" type="slidenum">
               <a:rPr lang="en-US"/>
-              <a:t>9</a:t>
+              <a:t>10</a:t>
             </a:fld>
             <a:endParaRPr/>
           </a:p>
@@ -12066,6 +11913,74 @@
 </p:sldLayout>
 </file>
 
+<file path=ppt/slideLayouts/slideLayout6.xml><?xml version="1.0" encoding="utf-8"?>
+<p:sldLayout xmlns:a="http://schemas.openxmlformats.org/drawingml/2006/main" xmlns:r="http://schemas.openxmlformats.org/officeDocument/2006/relationships" xmlns:p="http://schemas.openxmlformats.org/presentationml/2006/main" type="blank" preserve="1">
+  <p:cSld name="Blank">
+    <p:spTree>
+      <p:nvGrpSpPr>
+        <p:cNvPr id="1" name=""/>
+        <p:cNvGrpSpPr/>
+        <p:nvPr/>
+      </p:nvGrpSpPr>
+      <p:grpSpPr>
+        <a:xfrm>
+          <a:off x="0" y="0"/>
+          <a:ext cx="0" cy="0"/>
+          <a:chOff x="0" y="0"/>
+          <a:chExt cx="0" cy="0"/>
+        </a:xfrm>
+      </p:grpSpPr>
+      <p:sp>
+        <p:nvSpPr>
+          <p:cNvPr id="2" name="Slide Number Placeholder 1">
+            <a:extLst>
+              <a:ext uri="{FF2B5EF4-FFF2-40B4-BE49-F238E27FC236}">
+                <a16:creationId xmlns:a16="http://schemas.microsoft.com/office/drawing/2014/main" id="{4A70BB1C-9A43-A181-C0B4-DD04BD88A4E5}"/>
+              </a:ext>
+            </a:extLst>
+          </p:cNvPr>
+          <p:cNvSpPr>
+            <a:spLocks noGrp="1"/>
+          </p:cNvSpPr>
+          <p:nvPr>
+            <p:ph type="sldNum" idx="10"/>
+          </p:nvPr>
+        </p:nvSpPr>
+        <p:spPr/>
+        <p:txBody>
+          <a:bodyPr/>
+          <a:lstStyle/>
+          <a:p>
+            <a:pPr marL="0" lvl="0" indent="0" algn="r" rtl="0">
+              <a:spcBef>
+                <a:spcPts val="0"/>
+              </a:spcBef>
+              <a:spcAft>
+                <a:spcPts val="0"/>
+              </a:spcAft>
+              <a:buNone/>
+            </a:pPr>
+            <a:fld id="{00000000-1234-1234-1234-123412341234}" type="slidenum">
+              <a:rPr lang="en-US" smtClean="0"/>
+              <a:t>‹#›</a:t>
+            </a:fld>
+            <a:endParaRPr lang="en-US"/>
+          </a:p>
+        </p:txBody>
+      </p:sp>
+    </p:spTree>
+    <p:extLst>
+      <p:ext uri="{BB962C8B-B14F-4D97-AF65-F5344CB8AC3E}">
+        <p14:creationId xmlns:p14="http://schemas.microsoft.com/office/powerpoint/2010/main" val="281553960"/>
+      </p:ext>
+    </p:extLst>
+  </p:cSld>
+  <p:clrMapOvr>
+    <a:masterClrMapping/>
+  </p:clrMapOvr>
+</p:sldLayout>
+</file>
+
 <file path=ppt/slideMasters/slideMaster1.xml><?xml version="1.0" encoding="utf-8"?>
 <p:sldMaster xmlns:a="http://schemas.openxmlformats.org/drawingml/2006/main" xmlns:r="http://schemas.openxmlformats.org/officeDocument/2006/relationships" xmlns:p="http://schemas.openxmlformats.org/presentationml/2006/main">
   <p:cSld name="simple-light-2">
@@ -12917,6 +12832,7 @@
     <p:sldLayoutId id="2147483651" r:id="rId3"/>
     <p:sldLayoutId id="2147483652" r:id="rId4"/>
     <p:sldLayoutId id="2147483654" r:id="rId5"/>
+    <p:sldLayoutId id="2147483655" r:id="rId6"/>
   </p:sldLayoutIdLst>
   <p:hf sldNum="0" hdr="0" ftr="0" dt="0"/>
   <p:txStyles>
@@ -13731,7 +13647,7 @@
                 <a:cs typeface="Arial"/>
                 <a:sym typeface="Arial"/>
               </a:rPr>
-              <a:t>Interpretability: Simple ways of Understanding ML Models and their Predictions </a:t>
+              <a:t>Simple ways of Understanding ML Models and their Predictions </a:t>
             </a:r>
             <a:endParaRPr sz="3200" b="0" i="0" u="none" strike="noStrike" cap="none" dirty="0">
               <a:solidFill>
@@ -13825,9 +13741,9 @@
                 <a:cs typeface="Arial"/>
                 <a:sym typeface="Arial"/>
               </a:rPr>
-              <a:t>Rayid Ghani and Kit Rodolfa</a:t>
+              <a:t>Rayid Ghani</a:t>
             </a:r>
-            <a:endParaRPr sz="2800" b="0" i="0" u="none" strike="noStrike" cap="none">
+            <a:endParaRPr sz="2800" b="0" i="0" u="none" strike="noStrike" cap="none" dirty="0">
               <a:solidFill>
                 <a:srgbClr val="595959"/>
               </a:solidFill>
@@ -13879,6 +13795,116 @@
   <p:cSld>
     <p:spTree>
       <p:nvGrpSpPr>
+        <p:cNvPr id="1" name="Shape 107"/>
+        <p:cNvGrpSpPr/>
+        <p:nvPr/>
+      </p:nvGrpSpPr>
+      <p:grpSpPr>
+        <a:xfrm>
+          <a:off x="0" y="0"/>
+          <a:ext cx="0" cy="0"/>
+          <a:chOff x="0" y="0"/>
+          <a:chExt cx="0" cy="0"/>
+        </a:xfrm>
+      </p:grpSpPr>
+      <p:sp>
+        <p:nvSpPr>
+          <p:cNvPr id="108" name="Google Shape;108;g71c382910d_0_0"/>
+          <p:cNvSpPr txBox="1">
+            <a:spLocks noGrp="1"/>
+          </p:cNvSpPr>
+          <p:nvPr>
+            <p:ph type="title"/>
+          </p:nvPr>
+        </p:nvSpPr>
+        <p:spPr>
+          <a:xfrm>
+            <a:off x="415600" y="86563"/>
+            <a:ext cx="11360700" cy="763500"/>
+          </a:xfrm>
+          <a:prstGeom prst="rect">
+            <a:avLst/>
+          </a:prstGeom>
+        </p:spPr>
+        <p:txBody>
+          <a:bodyPr spcFirstLastPara="1" wrap="square" lIns="121900" tIns="121900" rIns="121900" bIns="121900" anchor="t" anchorCtr="0">
+            <a:noAutofit/>
+          </a:bodyPr>
+          <a:lstStyle/>
+          <a:p>
+            <a:pPr marL="0" lvl="0" indent="0" algn="l" rtl="0">
+              <a:spcBef>
+                <a:spcPts val="0"/>
+              </a:spcBef>
+              <a:spcAft>
+                <a:spcPts val="0"/>
+              </a:spcAft>
+              <a:buNone/>
+            </a:pPr>
+            <a:r>
+              <a:rPr lang="en-US"/>
+              <a:t>Feature Importances</a:t>
+            </a:r>
+            <a:endParaRPr/>
+          </a:p>
+        </p:txBody>
+      </p:sp>
+      <p:sp>
+        <p:nvSpPr>
+          <p:cNvPr id="109" name="Google Shape;109;g71c382910d_0_0"/>
+          <p:cNvSpPr txBox="1">
+            <a:spLocks noGrp="1"/>
+          </p:cNvSpPr>
+          <p:nvPr>
+            <p:ph type="body" idx="1"/>
+          </p:nvPr>
+        </p:nvSpPr>
+        <p:spPr>
+          <a:xfrm>
+            <a:off x="415600" y="1536633"/>
+            <a:ext cx="11360700" cy="4555200"/>
+          </a:xfrm>
+          <a:prstGeom prst="rect">
+            <a:avLst/>
+          </a:prstGeom>
+        </p:spPr>
+        <p:txBody>
+          <a:bodyPr spcFirstLastPara="1" wrap="square" lIns="121900" tIns="121900" rIns="121900" bIns="121900" anchor="t" anchorCtr="0">
+            <a:noAutofit/>
+          </a:bodyPr>
+          <a:lstStyle/>
+          <a:p>
+            <a:pPr marL="0" lvl="0" indent="0" algn="l" rtl="0">
+              <a:spcBef>
+                <a:spcPts val="0"/>
+              </a:spcBef>
+              <a:spcAft>
+                <a:spcPts val="0"/>
+              </a:spcAft>
+              <a:buNone/>
+            </a:pPr>
+            <a:endParaRPr/>
+          </a:p>
+        </p:txBody>
+      </p:sp>
+    </p:spTree>
+    <p:extLst>
+      <p:ext uri="{BB962C8B-B14F-4D97-AF65-F5344CB8AC3E}">
+        <p14:creationId xmlns:p14="http://schemas.microsoft.com/office/powerpoint/2010/main" val="31147705"/>
+      </p:ext>
+    </p:extLst>
+  </p:cSld>
+  <p:clrMapOvr>
+    <a:masterClrMapping/>
+  </p:clrMapOvr>
+</p:sld>
+</file>
+
+<file path=ppt/slides/slide11.xml><?xml version="1.0" encoding="utf-8"?>
+<p:sld xmlns:a="http://schemas.openxmlformats.org/drawingml/2006/main" xmlns:r="http://schemas.openxmlformats.org/officeDocument/2006/relationships" xmlns:p="http://schemas.openxmlformats.org/presentationml/2006/main">
+  <p:cSld>
+    <p:spTree>
+      <p:nvGrpSpPr>
         <p:cNvPr id="1" name="Shape 113"/>
         <p:cNvGrpSpPr/>
         <p:nvPr/>
@@ -14089,7 +14115,7 @@
 </p:sld>
 </file>
 
-<file path=ppt/slides/slide11.xml><?xml version="1.0" encoding="utf-8"?>
+<file path=ppt/slides/slide12.xml><?xml version="1.0" encoding="utf-8"?>
 <p:sld xmlns:a="http://schemas.openxmlformats.org/drawingml/2006/main" xmlns:r="http://schemas.openxmlformats.org/officeDocument/2006/relationships" xmlns:p="http://schemas.openxmlformats.org/presentationml/2006/main">
   <p:cSld>
     <p:spTree>
@@ -14297,7 +14323,7 @@
 </p:sld>
 </file>
 
-<file path=ppt/slides/slide12.xml><?xml version="1.0" encoding="utf-8"?>
+<file path=ppt/slides/slide13.xml><?xml version="1.0" encoding="utf-8"?>
 <p:sld xmlns:a="http://schemas.openxmlformats.org/drawingml/2006/main" xmlns:r="http://schemas.openxmlformats.org/officeDocument/2006/relationships" xmlns:p="http://schemas.openxmlformats.org/presentationml/2006/main">
   <p:cSld>
     <p:spTree>
@@ -15928,7 +15954,7 @@
 </p:sld>
 </file>
 
-<file path=ppt/slides/slide13.xml><?xml version="1.0" encoding="utf-8"?>
+<file path=ppt/slides/slide14.xml><?xml version="1.0" encoding="utf-8"?>
 <p:sld xmlns:a="http://schemas.openxmlformats.org/drawingml/2006/main" xmlns:r="http://schemas.openxmlformats.org/officeDocument/2006/relationships" xmlns:p="http://schemas.openxmlformats.org/presentationml/2006/main">
   <p:cSld>
     <p:spTree>
@@ -16083,7 +16109,7 @@
 </p:sld>
 </file>
 
-<file path=ppt/slides/slide14.xml><?xml version="1.0" encoding="utf-8"?>
+<file path=ppt/slides/slide15.xml><?xml version="1.0" encoding="utf-8"?>
 <p:sld xmlns:a="http://schemas.openxmlformats.org/drawingml/2006/main" xmlns:r="http://schemas.openxmlformats.org/officeDocument/2006/relationships" xmlns:p="http://schemas.openxmlformats.org/presentationml/2006/main">
   <p:cSld>
     <p:spTree>
@@ -16270,7 +16296,7 @@
 </p:sld>
 </file>
 
-<file path=ppt/slides/slide15.xml><?xml version="1.0" encoding="utf-8"?>
+<file path=ppt/slides/slide16.xml><?xml version="1.0" encoding="utf-8"?>
 <p:sld xmlns:a="http://schemas.openxmlformats.org/drawingml/2006/main" xmlns:r="http://schemas.openxmlformats.org/officeDocument/2006/relationships" xmlns:p="http://schemas.openxmlformats.org/presentationml/2006/main">
   <p:cSld>
     <p:spTree>
@@ -16764,7 +16790,7 @@
 </p:sld>
 </file>
 
-<file path=ppt/slides/slide16.xml><?xml version="1.0" encoding="utf-8"?>
+<file path=ppt/slides/slide17.xml><?xml version="1.0" encoding="utf-8"?>
 <p:sld xmlns:a="http://schemas.openxmlformats.org/drawingml/2006/main" xmlns:r="http://schemas.openxmlformats.org/officeDocument/2006/relationships" xmlns:p="http://schemas.openxmlformats.org/presentationml/2006/main">
   <p:cSld>
     <p:spTree>
@@ -17892,161 +17918,6 @@
 </p:sld>
 </file>
 
-<file path=ppt/slides/slide17.xml><?xml version="1.0" encoding="utf-8"?>
-<p:sld xmlns:a="http://schemas.openxmlformats.org/drawingml/2006/main" xmlns:r="http://schemas.openxmlformats.org/officeDocument/2006/relationships" xmlns:p="http://schemas.openxmlformats.org/presentationml/2006/main">
-  <p:cSld>
-    <p:spTree>
-      <p:nvGrpSpPr>
-        <p:cNvPr id="1" name="Shape 120"/>
-        <p:cNvGrpSpPr/>
-        <p:nvPr/>
-      </p:nvGrpSpPr>
-      <p:grpSpPr>
-        <a:xfrm>
-          <a:off x="0" y="0"/>
-          <a:ext cx="0" cy="0"/>
-          <a:chOff x="0" y="0"/>
-          <a:chExt cx="0" cy="0"/>
-        </a:xfrm>
-      </p:grpSpPr>
-      <p:sp>
-        <p:nvSpPr>
-          <p:cNvPr id="121" name="Google Shape;121;g71c382910d_0_6"/>
-          <p:cNvSpPr txBox="1">
-            <a:spLocks noGrp="1"/>
-          </p:cNvSpPr>
-          <p:nvPr>
-            <p:ph type="title"/>
-          </p:nvPr>
-        </p:nvSpPr>
-        <p:spPr>
-          <a:xfrm>
-            <a:off x="415600" y="86563"/>
-            <a:ext cx="11360700" cy="763500"/>
-          </a:xfrm>
-          <a:prstGeom prst="rect">
-            <a:avLst/>
-          </a:prstGeom>
-        </p:spPr>
-        <p:txBody>
-          <a:bodyPr spcFirstLastPara="1" wrap="square" lIns="121900" tIns="121900" rIns="121900" bIns="121900" anchor="t" anchorCtr="0">
-            <a:noAutofit/>
-          </a:bodyPr>
-          <a:lstStyle/>
-          <a:p>
-            <a:pPr marL="0" lvl="0" indent="0" algn="l" rtl="0">
-              <a:spcBef>
-                <a:spcPts val="0"/>
-              </a:spcBef>
-              <a:spcAft>
-                <a:spcPts val="0"/>
-              </a:spcAft>
-              <a:buNone/>
-            </a:pPr>
-            <a:r>
-              <a:rPr lang="en-US"/>
-              <a:t>Error Analysis</a:t>
-            </a:r>
-            <a:endParaRPr/>
-          </a:p>
-        </p:txBody>
-      </p:sp>
-      <p:sp>
-        <p:nvSpPr>
-          <p:cNvPr id="122" name="Google Shape;122;g71c382910d_0_6"/>
-          <p:cNvSpPr txBox="1">
-            <a:spLocks noGrp="1"/>
-          </p:cNvSpPr>
-          <p:nvPr>
-            <p:ph type="body" idx="1"/>
-          </p:nvPr>
-        </p:nvSpPr>
-        <p:spPr>
-          <a:xfrm>
-            <a:off x="415600" y="1536633"/>
-            <a:ext cx="11360700" cy="4555200"/>
-          </a:xfrm>
-          <a:prstGeom prst="rect">
-            <a:avLst/>
-          </a:prstGeom>
-        </p:spPr>
-        <p:txBody>
-          <a:bodyPr spcFirstLastPara="1" wrap="square" lIns="121900" tIns="121900" rIns="121900" bIns="121900" anchor="t" anchorCtr="0">
-            <a:noAutofit/>
-          </a:bodyPr>
-          <a:lstStyle/>
-          <a:p>
-            <a:pPr marL="457200" lvl="0" indent="-381000" algn="l" rtl="0">
-              <a:spcBef>
-                <a:spcPts val="0"/>
-              </a:spcBef>
-              <a:spcAft>
-                <a:spcPts val="0"/>
-              </a:spcAft>
-              <a:buSzPts val="2400"/>
-              <a:buChar char="●"/>
-            </a:pPr>
-            <a:r>
-              <a:rPr lang="en-US"/>
-              <a:t>Error Trees</a:t>
-            </a:r>
-            <a:br>
-              <a:rPr lang="en-US"/>
-            </a:br>
-            <a:endParaRPr/>
-          </a:p>
-          <a:p>
-            <a:pPr marL="457200" lvl="0" indent="-381000" algn="l" rtl="0">
-              <a:spcBef>
-                <a:spcPts val="0"/>
-              </a:spcBef>
-              <a:spcAft>
-                <a:spcPts val="0"/>
-              </a:spcAft>
-              <a:buSzPts val="2400"/>
-              <a:buChar char="●"/>
-            </a:pPr>
-            <a:r>
-              <a:rPr lang="en-US"/>
-              <a:t>Clustering</a:t>
-            </a:r>
-            <a:br>
-              <a:rPr lang="en-US"/>
-            </a:br>
-            <a:endParaRPr/>
-          </a:p>
-          <a:p>
-            <a:pPr marL="457200" lvl="0" indent="-381000" algn="l" rtl="0">
-              <a:spcBef>
-                <a:spcPts val="0"/>
-              </a:spcBef>
-              <a:spcAft>
-                <a:spcPts val="0"/>
-              </a:spcAft>
-              <a:buSzPts val="2400"/>
-              <a:buChar char="●"/>
-            </a:pPr>
-            <a:r>
-              <a:rPr lang="en-US"/>
-              <a:t>Individual Feature Importances</a:t>
-            </a:r>
-            <a:endParaRPr/>
-          </a:p>
-        </p:txBody>
-      </p:sp>
-    </p:spTree>
-    <p:extLst>
-      <p:ext uri="{BB962C8B-B14F-4D97-AF65-F5344CB8AC3E}">
-        <p14:creationId xmlns:p14="http://schemas.microsoft.com/office/powerpoint/2010/main" val="1694156912"/>
-      </p:ext>
-    </p:extLst>
-  </p:cSld>
-  <p:clrMapOvr>
-    <a:masterClrMapping/>
-  </p:clrMapOvr>
-</p:sld>
-</file>
-
 <file path=ppt/slides/slide18.xml><?xml version="1.0" encoding="utf-8"?>
 <p:sld xmlns:a="http://schemas.openxmlformats.org/drawingml/2006/main" xmlns:r="http://schemas.openxmlformats.org/officeDocument/2006/relationships" xmlns:p="http://schemas.openxmlformats.org/presentationml/2006/main">
   <p:cSld>
@@ -18099,6 +17970,161 @@
               <a:buNone/>
             </a:pPr>
             <a:r>
+              <a:rPr lang="en-US"/>
+              <a:t>Error Analysis</a:t>
+            </a:r>
+            <a:endParaRPr/>
+          </a:p>
+        </p:txBody>
+      </p:sp>
+      <p:sp>
+        <p:nvSpPr>
+          <p:cNvPr id="122" name="Google Shape;122;g71c382910d_0_6"/>
+          <p:cNvSpPr txBox="1">
+            <a:spLocks noGrp="1"/>
+          </p:cNvSpPr>
+          <p:nvPr>
+            <p:ph type="body" idx="1"/>
+          </p:nvPr>
+        </p:nvSpPr>
+        <p:spPr>
+          <a:xfrm>
+            <a:off x="415600" y="1536633"/>
+            <a:ext cx="11360700" cy="4555200"/>
+          </a:xfrm>
+          <a:prstGeom prst="rect">
+            <a:avLst/>
+          </a:prstGeom>
+        </p:spPr>
+        <p:txBody>
+          <a:bodyPr spcFirstLastPara="1" wrap="square" lIns="121900" tIns="121900" rIns="121900" bIns="121900" anchor="t" anchorCtr="0">
+            <a:noAutofit/>
+          </a:bodyPr>
+          <a:lstStyle/>
+          <a:p>
+            <a:pPr marL="457200" lvl="0" indent="-381000" algn="l" rtl="0">
+              <a:spcBef>
+                <a:spcPts val="0"/>
+              </a:spcBef>
+              <a:spcAft>
+                <a:spcPts val="0"/>
+              </a:spcAft>
+              <a:buSzPts val="2400"/>
+              <a:buChar char="●"/>
+            </a:pPr>
+            <a:r>
+              <a:rPr lang="en-US"/>
+              <a:t>Error Trees</a:t>
+            </a:r>
+            <a:br>
+              <a:rPr lang="en-US"/>
+            </a:br>
+            <a:endParaRPr/>
+          </a:p>
+          <a:p>
+            <a:pPr marL="457200" lvl="0" indent="-381000" algn="l" rtl="0">
+              <a:spcBef>
+                <a:spcPts val="0"/>
+              </a:spcBef>
+              <a:spcAft>
+                <a:spcPts val="0"/>
+              </a:spcAft>
+              <a:buSzPts val="2400"/>
+              <a:buChar char="●"/>
+            </a:pPr>
+            <a:r>
+              <a:rPr lang="en-US"/>
+              <a:t>Clustering</a:t>
+            </a:r>
+            <a:br>
+              <a:rPr lang="en-US"/>
+            </a:br>
+            <a:endParaRPr/>
+          </a:p>
+          <a:p>
+            <a:pPr marL="457200" lvl="0" indent="-381000" algn="l" rtl="0">
+              <a:spcBef>
+                <a:spcPts val="0"/>
+              </a:spcBef>
+              <a:spcAft>
+                <a:spcPts val="0"/>
+              </a:spcAft>
+              <a:buSzPts val="2400"/>
+              <a:buChar char="●"/>
+            </a:pPr>
+            <a:r>
+              <a:rPr lang="en-US"/>
+              <a:t>Individual Feature Importances</a:t>
+            </a:r>
+            <a:endParaRPr/>
+          </a:p>
+        </p:txBody>
+      </p:sp>
+    </p:spTree>
+    <p:extLst>
+      <p:ext uri="{BB962C8B-B14F-4D97-AF65-F5344CB8AC3E}">
+        <p14:creationId xmlns:p14="http://schemas.microsoft.com/office/powerpoint/2010/main" val="1694156912"/>
+      </p:ext>
+    </p:extLst>
+  </p:cSld>
+  <p:clrMapOvr>
+    <a:masterClrMapping/>
+  </p:clrMapOvr>
+</p:sld>
+</file>
+
+<file path=ppt/slides/slide19.xml><?xml version="1.0" encoding="utf-8"?>
+<p:sld xmlns:a="http://schemas.openxmlformats.org/drawingml/2006/main" xmlns:r="http://schemas.openxmlformats.org/officeDocument/2006/relationships" xmlns:p="http://schemas.openxmlformats.org/presentationml/2006/main" show="0">
+  <p:cSld>
+    <p:spTree>
+      <p:nvGrpSpPr>
+        <p:cNvPr id="1" name="Shape 120"/>
+        <p:cNvGrpSpPr/>
+        <p:nvPr/>
+      </p:nvGrpSpPr>
+      <p:grpSpPr>
+        <a:xfrm>
+          <a:off x="0" y="0"/>
+          <a:ext cx="0" cy="0"/>
+          <a:chOff x="0" y="0"/>
+          <a:chExt cx="0" cy="0"/>
+        </a:xfrm>
+      </p:grpSpPr>
+      <p:sp>
+        <p:nvSpPr>
+          <p:cNvPr id="121" name="Google Shape;121;g71c382910d_0_6"/>
+          <p:cNvSpPr txBox="1">
+            <a:spLocks noGrp="1"/>
+          </p:cNvSpPr>
+          <p:nvPr>
+            <p:ph type="title"/>
+          </p:nvPr>
+        </p:nvSpPr>
+        <p:spPr>
+          <a:xfrm>
+            <a:off x="415600" y="86563"/>
+            <a:ext cx="11360700" cy="763500"/>
+          </a:xfrm>
+          <a:prstGeom prst="rect">
+            <a:avLst/>
+          </a:prstGeom>
+        </p:spPr>
+        <p:txBody>
+          <a:bodyPr spcFirstLastPara="1" wrap="square" lIns="121900" tIns="121900" rIns="121900" bIns="121900" anchor="t" anchorCtr="0">
+            <a:noAutofit/>
+          </a:bodyPr>
+          <a:lstStyle/>
+          <a:p>
+            <a:pPr marL="0" lvl="0" indent="0" algn="l" rtl="0">
+              <a:spcBef>
+                <a:spcPts val="0"/>
+              </a:spcBef>
+              <a:spcAft>
+                <a:spcPts val="0"/>
+              </a:spcAft>
+              <a:buNone/>
+            </a:pPr>
+            <a:r>
               <a:rPr lang="en-US" dirty="0"/>
               <a:t>Module 2 Presentation Reminders</a:t>
             </a:r>
@@ -18221,8 +18247,137 @@
 </p:sld>
 </file>
 
-<file path=ppt/slides/slide19.xml><?xml version="1.0" encoding="utf-8"?>
+<file path=ppt/slides/slide2.xml><?xml version="1.0" encoding="utf-8"?>
 <p:sld xmlns:a="http://schemas.openxmlformats.org/drawingml/2006/main" xmlns:r="http://schemas.openxmlformats.org/officeDocument/2006/relationships" xmlns:p="http://schemas.openxmlformats.org/presentationml/2006/main">
+  <p:cSld>
+    <p:spTree>
+      <p:nvGrpSpPr>
+        <p:cNvPr id="1" name=""/>
+        <p:cNvGrpSpPr/>
+        <p:nvPr/>
+      </p:nvGrpSpPr>
+      <p:grpSpPr>
+        <a:xfrm>
+          <a:off x="0" y="0"/>
+          <a:ext cx="0" cy="0"/>
+          <a:chOff x="0" y="0"/>
+          <a:chExt cx="0" cy="0"/>
+        </a:xfrm>
+      </p:grpSpPr>
+      <p:sp>
+        <p:nvSpPr>
+          <p:cNvPr id="2" name="Title 1">
+            <a:extLst>
+              <a:ext uri="{FF2B5EF4-FFF2-40B4-BE49-F238E27FC236}">
+                <a16:creationId xmlns:a16="http://schemas.microsoft.com/office/drawing/2014/main" id="{94CF2A94-A63F-6149-AA28-2E35B60E3D3E}"/>
+              </a:ext>
+            </a:extLst>
+          </p:cNvPr>
+          <p:cNvSpPr>
+            <a:spLocks noGrp="1"/>
+          </p:cNvSpPr>
+          <p:nvPr>
+            <p:ph type="title"/>
+          </p:nvPr>
+        </p:nvSpPr>
+        <p:spPr/>
+        <p:txBody>
+          <a:bodyPr/>
+          <a:lstStyle/>
+          <a:p>
+            <a:endParaRPr lang="en-US"/>
+          </a:p>
+        </p:txBody>
+      </p:sp>
+      <p:graphicFrame>
+        <p:nvGraphicFramePr>
+          <p:cNvPr id="3" name="Diagram 2">
+            <a:extLst>
+              <a:ext uri="{FF2B5EF4-FFF2-40B4-BE49-F238E27FC236}">
+                <a16:creationId xmlns:a16="http://schemas.microsoft.com/office/drawing/2014/main" id="{8E902576-68A9-6E48-B0FE-5B1889953DC8}"/>
+              </a:ext>
+            </a:extLst>
+          </p:cNvPr>
+          <p:cNvGraphicFramePr/>
+          <p:nvPr/>
+        </p:nvGraphicFramePr>
+        <p:xfrm>
+          <a:off x="180467" y="0"/>
+          <a:ext cx="11776400" cy="6858000"/>
+        </p:xfrm>
+        <a:graphic>
+          <a:graphicData uri="http://schemas.openxmlformats.org/drawingml/2006/diagram">
+            <dgm:relIds xmlns:dgm="http://schemas.openxmlformats.org/drawingml/2006/diagram" xmlns:r="http://schemas.openxmlformats.org/officeDocument/2006/relationships" r:dm="rId2" r:lo="rId3" r:qs="rId4" r:cs="rId5"/>
+          </a:graphicData>
+        </a:graphic>
+      </p:graphicFrame>
+      <p:sp>
+        <p:nvSpPr>
+          <p:cNvPr id="4" name="Rectangle 3">
+            <a:extLst>
+              <a:ext uri="{FF2B5EF4-FFF2-40B4-BE49-F238E27FC236}">
+                <a16:creationId xmlns:a16="http://schemas.microsoft.com/office/drawing/2014/main" id="{E2C99BF2-C81A-5246-89D3-E49BCDCAD699}"/>
+              </a:ext>
+            </a:extLst>
+          </p:cNvPr>
+          <p:cNvSpPr/>
+          <p:nvPr/>
+        </p:nvSpPr>
+        <p:spPr>
+          <a:xfrm>
+            <a:off x="6388892" y="2534144"/>
+            <a:ext cx="2534195" cy="1789611"/>
+          </a:xfrm>
+          <a:prstGeom prst="rect">
+            <a:avLst/>
+          </a:prstGeom>
+          <a:noFill/>
+          <a:ln w="76200">
+            <a:solidFill>
+              <a:srgbClr val="C00000"/>
+            </a:solidFill>
+          </a:ln>
+        </p:spPr>
+        <p:style>
+          <a:lnRef idx="2">
+            <a:schemeClr val="accent1">
+              <a:shade val="50000"/>
+            </a:schemeClr>
+          </a:lnRef>
+          <a:fillRef idx="1">
+            <a:schemeClr val="accent1"/>
+          </a:fillRef>
+          <a:effectRef idx="0">
+            <a:schemeClr val="accent1"/>
+          </a:effectRef>
+          <a:fontRef idx="minor">
+            <a:schemeClr val="lt1"/>
+          </a:fontRef>
+        </p:style>
+        <p:txBody>
+          <a:bodyPr rtlCol="0" anchor="ctr"/>
+          <a:lstStyle/>
+          <a:p>
+            <a:pPr algn="ctr"/>
+            <a:endParaRPr lang="en-US"/>
+          </a:p>
+        </p:txBody>
+      </p:sp>
+    </p:spTree>
+    <p:extLst>
+      <p:ext uri="{BB962C8B-B14F-4D97-AF65-F5344CB8AC3E}">
+        <p14:creationId xmlns:p14="http://schemas.microsoft.com/office/powerpoint/2010/main" val="1582547232"/>
+      </p:ext>
+    </p:extLst>
+  </p:cSld>
+  <p:clrMapOvr>
+    <a:masterClrMapping/>
+  </p:clrMapOvr>
+</p:sld>
+</file>
+
+<file path=ppt/slides/slide20.xml><?xml version="1.0" encoding="utf-8"?>
+<p:sld xmlns:a="http://schemas.openxmlformats.org/drawingml/2006/main" xmlns:r="http://schemas.openxmlformats.org/officeDocument/2006/relationships" xmlns:p="http://schemas.openxmlformats.org/presentationml/2006/main" show="0">
   <p:cSld>
     <p:spTree>
       <p:nvGrpSpPr>
@@ -18739,146 +18894,8 @@
 </p:sld>
 </file>
 
-<file path=ppt/slides/slide2.xml><?xml version="1.0" encoding="utf-8"?>
-<p:sld xmlns:a="http://schemas.openxmlformats.org/drawingml/2006/main" xmlns:r="http://schemas.openxmlformats.org/officeDocument/2006/relationships" xmlns:p="http://schemas.openxmlformats.org/presentationml/2006/main">
-  <p:cSld>
-    <p:spTree>
-      <p:nvGrpSpPr>
-        <p:cNvPr id="1" name=""/>
-        <p:cNvGrpSpPr/>
-        <p:nvPr/>
-      </p:nvGrpSpPr>
-      <p:grpSpPr>
-        <a:xfrm>
-          <a:off x="0" y="0"/>
-          <a:ext cx="0" cy="0"/>
-          <a:chOff x="0" y="0"/>
-          <a:chExt cx="0" cy="0"/>
-        </a:xfrm>
-      </p:grpSpPr>
-      <p:sp>
-        <p:nvSpPr>
-          <p:cNvPr id="3" name="Title 2">
-            <a:extLst>
-              <a:ext uri="{FF2B5EF4-FFF2-40B4-BE49-F238E27FC236}">
-                <a16:creationId xmlns:a16="http://schemas.microsoft.com/office/drawing/2014/main" id="{9323871C-7CA8-1448-8FFC-1AE6E1838941}"/>
-              </a:ext>
-            </a:extLst>
-          </p:cNvPr>
-          <p:cNvSpPr>
-            <a:spLocks noGrp="1"/>
-          </p:cNvSpPr>
-          <p:nvPr>
-            <p:ph type="title"/>
-          </p:nvPr>
-        </p:nvSpPr>
-        <p:spPr/>
-        <p:txBody>
-          <a:bodyPr/>
-          <a:lstStyle/>
-          <a:p>
-            <a:r>
-              <a:rPr lang="en-US" dirty="0"/>
-              <a:t>Reminders</a:t>
-            </a:r>
-          </a:p>
-        </p:txBody>
-      </p:sp>
-      <p:sp>
-        <p:nvSpPr>
-          <p:cNvPr id="5" name="Text Placeholder 4">
-            <a:extLst>
-              <a:ext uri="{FF2B5EF4-FFF2-40B4-BE49-F238E27FC236}">
-                <a16:creationId xmlns:a16="http://schemas.microsoft.com/office/drawing/2014/main" id="{F4E0A5F0-1D89-954D-91FB-596CD9E690F2}"/>
-              </a:ext>
-            </a:extLst>
-          </p:cNvPr>
-          <p:cNvSpPr>
-            <a:spLocks noGrp="1"/>
-          </p:cNvSpPr>
-          <p:nvPr>
-            <p:ph type="body" idx="1"/>
-          </p:nvPr>
-        </p:nvSpPr>
-        <p:spPr/>
-        <p:txBody>
-          <a:bodyPr/>
-          <a:lstStyle/>
-          <a:p>
-            <a:pPr marL="76200" indent="0">
-              <a:buNone/>
-            </a:pPr>
-            <a:endParaRPr lang="en-US" b="1" dirty="0"/>
-          </a:p>
-          <a:p>
-            <a:pPr marL="76200" indent="0">
-              <a:buNone/>
-            </a:pPr>
-            <a:r>
-              <a:rPr lang="en-US" b="1" dirty="0"/>
-              <a:t>This week:</a:t>
-            </a:r>
-          </a:p>
-          <a:p>
-            <a:r>
-              <a:rPr lang="en-US" dirty="0"/>
-              <a:t>Thursday: Module 2 Presentations</a:t>
-            </a:r>
-          </a:p>
-          <a:p>
-            <a:pPr marL="76200" indent="0">
-              <a:buNone/>
-            </a:pPr>
-            <a:endParaRPr lang="en-US" dirty="0"/>
-          </a:p>
-          <a:p>
-            <a:pPr marL="76200" indent="0">
-              <a:buNone/>
-            </a:pPr>
-            <a:r>
-              <a:rPr lang="en-US" b="1" dirty="0"/>
-              <a:t>Coming up next week:</a:t>
-            </a:r>
-          </a:p>
-          <a:p>
-            <a:r>
-              <a:rPr lang="en-US" dirty="0"/>
-              <a:t>Tuesday: Feedback Form</a:t>
-            </a:r>
-          </a:p>
-          <a:p>
-            <a:r>
-              <a:rPr lang="en-US" dirty="0"/>
-              <a:t>Tuesday/Thursday: Module 2 Presentations</a:t>
-            </a:r>
-          </a:p>
-          <a:p>
-            <a:r>
-              <a:rPr lang="en-US" dirty="0">
-                <a:solidFill>
-                  <a:srgbClr val="C00000"/>
-                </a:solidFill>
-              </a:rPr>
-              <a:t>Friday: Extended Abstract on Interpretability</a:t>
-            </a:r>
-          </a:p>
-        </p:txBody>
-      </p:sp>
-    </p:spTree>
-    <p:extLst>
-      <p:ext uri="{BB962C8B-B14F-4D97-AF65-F5344CB8AC3E}">
-        <p14:creationId xmlns:p14="http://schemas.microsoft.com/office/powerpoint/2010/main" val="850274891"/>
-      </p:ext>
-    </p:extLst>
-  </p:cSld>
-  <p:clrMapOvr>
-    <a:masterClrMapping/>
-  </p:clrMapOvr>
-</p:sld>
-</file>
-
-<file path=ppt/slides/slide20.xml><?xml version="1.0" encoding="utf-8"?>
-<p:sld xmlns:a="http://schemas.openxmlformats.org/drawingml/2006/main" xmlns:r="http://schemas.openxmlformats.org/officeDocument/2006/relationships" xmlns:p="http://schemas.openxmlformats.org/presentationml/2006/main">
+<file path=ppt/slides/slide21.xml><?xml version="1.0" encoding="utf-8"?>
+<p:sld xmlns:a="http://schemas.openxmlformats.org/drawingml/2006/main" xmlns:r="http://schemas.openxmlformats.org/officeDocument/2006/relationships" xmlns:p="http://schemas.openxmlformats.org/presentationml/2006/main" show="0">
   <p:cSld>
     <p:spTree>
       <p:nvGrpSpPr>
@@ -20216,120 +20233,6 @@
 </p:sld>
 </file>
 
-<file path=ppt/slides/slide21.xml><?xml version="1.0" encoding="utf-8"?>
-<p:sld xmlns:a="http://schemas.openxmlformats.org/drawingml/2006/main" xmlns:r="http://schemas.openxmlformats.org/officeDocument/2006/relationships" xmlns:p="http://schemas.openxmlformats.org/presentationml/2006/main">
-  <p:cSld>
-    <p:spTree>
-      <p:nvGrpSpPr>
-        <p:cNvPr id="1" name="Shape 120"/>
-        <p:cNvGrpSpPr/>
-        <p:nvPr/>
-      </p:nvGrpSpPr>
-      <p:grpSpPr>
-        <a:xfrm>
-          <a:off x="0" y="0"/>
-          <a:ext cx="0" cy="0"/>
-          <a:chOff x="0" y="0"/>
-          <a:chExt cx="0" cy="0"/>
-        </a:xfrm>
-      </p:grpSpPr>
-      <p:sp>
-        <p:nvSpPr>
-          <p:cNvPr id="121" name="Google Shape;121;g71c382910d_0_6"/>
-          <p:cNvSpPr txBox="1">
-            <a:spLocks noGrp="1"/>
-          </p:cNvSpPr>
-          <p:nvPr>
-            <p:ph type="title"/>
-          </p:nvPr>
-        </p:nvSpPr>
-        <p:spPr>
-          <a:xfrm>
-            <a:off x="415600" y="86563"/>
-            <a:ext cx="11360700" cy="763500"/>
-          </a:xfrm>
-          <a:prstGeom prst="rect">
-            <a:avLst/>
-          </a:prstGeom>
-        </p:spPr>
-        <p:txBody>
-          <a:bodyPr spcFirstLastPara="1" wrap="square" lIns="121900" tIns="121900" rIns="121900" bIns="121900" anchor="t" anchorCtr="0">
-            <a:noAutofit/>
-          </a:bodyPr>
-          <a:lstStyle/>
-          <a:p>
-            <a:pPr marL="0" lvl="0" indent="0" algn="l" rtl="0">
-              <a:spcBef>
-                <a:spcPts val="0"/>
-              </a:spcBef>
-              <a:spcAft>
-                <a:spcPts val="0"/>
-              </a:spcAft>
-              <a:buNone/>
-            </a:pPr>
-            <a:r>
-              <a:rPr lang="en-US" dirty="0"/>
-              <a:t>Module 2 Presentation Questions</a:t>
-            </a:r>
-            <a:endParaRPr dirty="0"/>
-          </a:p>
-        </p:txBody>
-      </p:sp>
-      <p:sp>
-        <p:nvSpPr>
-          <p:cNvPr id="122" name="Google Shape;122;g71c382910d_0_6"/>
-          <p:cNvSpPr txBox="1">
-            <a:spLocks noGrp="1"/>
-          </p:cNvSpPr>
-          <p:nvPr>
-            <p:ph type="body" idx="1"/>
-          </p:nvPr>
-        </p:nvSpPr>
-        <p:spPr>
-          <a:xfrm>
-            <a:off x="415600" y="1536633"/>
-            <a:ext cx="11360700" cy="4555200"/>
-          </a:xfrm>
-          <a:prstGeom prst="rect">
-            <a:avLst/>
-          </a:prstGeom>
-        </p:spPr>
-        <p:txBody>
-          <a:bodyPr spcFirstLastPara="1" wrap="square" lIns="121900" tIns="121900" rIns="121900" bIns="121900" anchor="t" anchorCtr="0">
-            <a:noAutofit/>
-          </a:bodyPr>
-          <a:lstStyle/>
-          <a:p>
-            <a:pPr marL="76200" lvl="0" indent="0" algn="l" rtl="0">
-              <a:spcBef>
-                <a:spcPts val="0"/>
-              </a:spcBef>
-              <a:spcAft>
-                <a:spcPts val="0"/>
-              </a:spcAft>
-              <a:buSzPts val="2400"/>
-              <a:buNone/>
-            </a:pPr>
-            <a:r>
-              <a:rPr lang="en-US" sz="3200" dirty="0"/>
-              <a:t>Any questions on presentations for module 2? How are things going so far?</a:t>
-            </a:r>
-          </a:p>
-        </p:txBody>
-      </p:sp>
-    </p:spTree>
-    <p:extLst>
-      <p:ext uri="{BB962C8B-B14F-4D97-AF65-F5344CB8AC3E}">
-        <p14:creationId xmlns:p14="http://schemas.microsoft.com/office/powerpoint/2010/main" val="1158827108"/>
-      </p:ext>
-    </p:extLst>
-  </p:cSld>
-  <p:clrMapOvr>
-    <a:masterClrMapping/>
-  </p:clrMapOvr>
-</p:sld>
-</file>
-
 <file path=ppt/slides/slide22.xml><?xml version="1.0" encoding="utf-8"?>
 <p:sld xmlns:a="http://schemas.openxmlformats.org/drawingml/2006/main" xmlns:r="http://schemas.openxmlformats.org/officeDocument/2006/relationships" xmlns:p="http://schemas.openxmlformats.org/presentationml/2006/main">
   <p:cSld>
@@ -20490,7 +20393,7 @@
           <p:cNvPr id="2" name="Title 1">
             <a:extLst>
               <a:ext uri="{FF2B5EF4-FFF2-40B4-BE49-F238E27FC236}">
-                <a16:creationId xmlns:a16="http://schemas.microsoft.com/office/drawing/2014/main" id="{94CF2A94-A63F-6149-AA28-2E35B60E3D3E}"/>
+                <a16:creationId xmlns:a16="http://schemas.microsoft.com/office/drawing/2014/main" id="{9BED88CE-1F34-7CFF-CFE3-7F26F2553BFE}"/>
               </a:ext>
             </a:extLst>
           </p:cNvPr>
@@ -20510,59 +20413,90 @@
           </a:p>
         </p:txBody>
       </p:sp>
-      <p:graphicFrame>
-        <p:nvGraphicFramePr>
-          <p:cNvPr id="3" name="Diagram 2">
+    </p:spTree>
+    <p:extLst>
+      <p:ext uri="{BB962C8B-B14F-4D97-AF65-F5344CB8AC3E}">
+        <p14:creationId xmlns:p14="http://schemas.microsoft.com/office/powerpoint/2010/main" val="431481951"/>
+      </p:ext>
+    </p:extLst>
+  </p:cSld>
+  <p:clrMapOvr>
+    <a:masterClrMapping/>
+  </p:clrMapOvr>
+</p:sld>
+</file>
+
+<file path=ppt/slides/slide4.xml><?xml version="1.0" encoding="utf-8"?>
+<p:sld xmlns:a="http://schemas.openxmlformats.org/drawingml/2006/main" xmlns:r="http://schemas.openxmlformats.org/officeDocument/2006/relationships" xmlns:p="http://schemas.openxmlformats.org/presentationml/2006/main" showMasterSp="0">
+  <p:cSld>
+    <p:bg>
+      <p:bgPr>
+        <a:solidFill>
+          <a:srgbClr val="FFFFFF"/>
+        </a:solidFill>
+        <a:effectLst/>
+      </p:bgPr>
+    </p:bg>
+    <p:spTree>
+      <p:nvGrpSpPr>
+        <p:cNvPr id="1" name=""/>
+        <p:cNvGrpSpPr/>
+        <p:nvPr/>
+      </p:nvGrpSpPr>
+      <p:grpSpPr>
+        <a:xfrm>
+          <a:off x="0" y="0"/>
+          <a:ext cx="0" cy="0"/>
+          <a:chOff x="0" y="0"/>
+          <a:chExt cx="0" cy="0"/>
+        </a:xfrm>
+      </p:grpSpPr>
+      <p:sp>
+        <p:nvSpPr>
+          <p:cNvPr id="2" name="Rectangle 1">
             <a:extLst>
               <a:ext uri="{FF2B5EF4-FFF2-40B4-BE49-F238E27FC236}">
-                <a16:creationId xmlns:a16="http://schemas.microsoft.com/office/drawing/2014/main" id="{8E902576-68A9-6E48-B0FE-5B1889953DC8}"/>
-              </a:ext>
-            </a:extLst>
-          </p:cNvPr>
-          <p:cNvGraphicFramePr/>
-          <p:nvPr/>
-        </p:nvGraphicFramePr>
-        <p:xfrm>
-          <a:off x="180467" y="0"/>
-          <a:ext cx="11776400" cy="6858000"/>
-        </p:xfrm>
-        <a:graphic>
-          <a:graphicData uri="http://schemas.openxmlformats.org/drawingml/2006/diagram">
-            <dgm:relIds xmlns:dgm="http://schemas.openxmlformats.org/drawingml/2006/diagram" xmlns:r="http://schemas.openxmlformats.org/officeDocument/2006/relationships" r:dm="rId2" r:lo="rId3" r:qs="rId4" r:cs="rId5"/>
-          </a:graphicData>
-        </a:graphic>
-      </p:graphicFrame>
-      <p:sp>
-        <p:nvSpPr>
-          <p:cNvPr id="4" name="Rectangle 3">
-            <a:extLst>
-              <a:ext uri="{FF2B5EF4-FFF2-40B4-BE49-F238E27FC236}">
-                <a16:creationId xmlns:a16="http://schemas.microsoft.com/office/drawing/2014/main" id="{E2C99BF2-C81A-5246-89D3-E49BCDCAD699}"/>
+                <a16:creationId xmlns:a16="http://schemas.microsoft.com/office/drawing/2014/main" id="{9A249004-EFEC-7864-5850-04B239F0FC09}"/>
               </a:ext>
             </a:extLst>
           </p:cNvPr>
           <p:cNvSpPr/>
-          <p:nvPr/>
+          <p:nvPr>
+            <p:custDataLst>
+              <p:tags r:id="rId2"/>
+            </p:custDataLst>
+          </p:nvPr>
         </p:nvSpPr>
         <p:spPr>
           <a:xfrm>
-            <a:off x="6388892" y="2534144"/>
-            <a:ext cx="2534195" cy="1789611"/>
+            <a:off x="444693" y="1742703"/>
+            <a:ext cx="2371696" cy="2371696"/>
           </a:xfrm>
           <a:prstGeom prst="rect">
             <a:avLst/>
           </a:prstGeom>
-          <a:noFill/>
-          <a:ln w="76200">
+          <a:blipFill>
+            <a:blip r:embed="rId5">
+              <a:extLst>
+                <a:ext uri="{96DAC541-7B7A-43D3-8B79-37D633B846F1}">
+                  <asvg:svgBlip xmlns:asvg="http://schemas.microsoft.com/office/drawing/2016/SVG/main" r:embed="rId6"/>
+                </a:ext>
+              </a:extLst>
+            </a:blip>
+            <a:stretch>
+              <a:fillRect/>
+            </a:stretch>
+          </a:blipFill>
+          <a:ln>
             <a:solidFill>
-              <a:srgbClr val="C00000"/>
+              <a:srgbClr val="FFFFFF"/>
             </a:solidFill>
           </a:ln>
         </p:spPr>
         <p:style>
           <a:lnRef idx="2">
             <a:schemeClr val="accent1">
-              <a:shade val="50000"/>
+              <a:shade val="15000"/>
             </a:schemeClr>
           </a:lnRef>
           <a:fillRef idx="1">
@@ -20584,21 +20518,441 @@
           </a:p>
         </p:txBody>
       </p:sp>
+      <p:sp>
+        <p:nvSpPr>
+          <p:cNvPr id="3" name="Rectangle 2">
+            <a:extLst>
+              <a:ext uri="{FF2B5EF4-FFF2-40B4-BE49-F238E27FC236}">
+                <a16:creationId xmlns:a16="http://schemas.microsoft.com/office/drawing/2014/main" id="{4D6C442F-7112-3A48-F885-AD31E42A4504}"/>
+              </a:ext>
+            </a:extLst>
+          </p:cNvPr>
+          <p:cNvSpPr/>
+          <p:nvPr>
+            <p:custDataLst>
+              <p:tags r:id="rId3"/>
+            </p:custDataLst>
+          </p:nvPr>
+        </p:nvSpPr>
+        <p:spPr>
+          <a:xfrm>
+            <a:off x="3112851" y="1000897"/>
+            <a:ext cx="8486226" cy="3855308"/>
+          </a:xfrm>
+          <a:prstGeom prst="rect">
+            <a:avLst/>
+          </a:prstGeom>
+          <a:noFill/>
+          <a:ln w="25400" cap="flat" cmpd="sng" algn="ctr">
+            <a:solidFill>
+              <a:srgbClr val="FFFFFF"/>
+            </a:solidFill>
+            <a:prstDash val="solid"/>
+          </a:ln>
+          <a:effectLst/>
+          <a:extLst>
+            <a:ext uri="{909E8E84-426E-40DD-AFC4-6F175D3DCCD1}">
+              <a14:hiddenFill xmlns:a14="http://schemas.microsoft.com/office/drawing/2010/main">
+                <a:solidFill>
+                  <a:schemeClr val="accent1"/>
+                </a:solidFill>
+              </a14:hiddenFill>
+            </a:ext>
+          </a:extLst>
+        </p:spPr>
+        <p:style>
+          <a:lnRef idx="2">
+            <a:schemeClr val="accent1">
+              <a:shade val="15000"/>
+            </a:schemeClr>
+          </a:lnRef>
+          <a:fillRef idx="1">
+            <a:schemeClr val="accent1"/>
+          </a:fillRef>
+          <a:effectRef idx="0">
+            <a:schemeClr val="accent1"/>
+          </a:effectRef>
+          <a:fontRef idx="minor">
+            <a:schemeClr val="lt1"/>
+          </a:fontRef>
+        </p:style>
+        <p:txBody>
+          <a:bodyPr rtlCol="0" anchor="ctr"/>
+          <a:lstStyle/>
+          <a:p>
+            <a:r>
+              <a:rPr lang="en-US" sz="3100" b="1">
+                <a:solidFill>
+                  <a:srgbClr val="000000"/>
+                </a:solidFill>
+              </a:rPr>
+              <a:t>How would you compare the top performing models for your project in terms of “what they’re doing”? </a:t>
+            </a:r>
+          </a:p>
+        </p:txBody>
+      </p:sp>
+      <p:sp>
+        <p:nvSpPr>
+          <p:cNvPr id="4" name="Rectangle 3">
+            <a:extLst>
+              <a:ext uri="{FF2B5EF4-FFF2-40B4-BE49-F238E27FC236}">
+                <a16:creationId xmlns:a16="http://schemas.microsoft.com/office/drawing/2014/main" id="{BF544AFD-3BA1-E0AC-B266-A310C2D67BE0}"/>
+              </a:ext>
+            </a:extLst>
+          </p:cNvPr>
+          <p:cNvSpPr/>
+          <p:nvPr/>
+        </p:nvSpPr>
+        <p:spPr>
+          <a:xfrm>
+            <a:off x="0" y="5820032"/>
+            <a:ext cx="12192001" cy="1037968"/>
+          </a:xfrm>
+          <a:prstGeom prst="rect">
+            <a:avLst/>
+          </a:prstGeom>
+          <a:solidFill>
+            <a:srgbClr val="198038"/>
+          </a:solidFill>
+          <a:ln w="25400" cap="flat" cmpd="sng" algn="ctr">
+            <a:noFill/>
+            <a:prstDash val="solid"/>
+          </a:ln>
+          <a:effectLst/>
+          <a:extLst>
+            <a:ext uri="{91240B29-F687-4F45-9708-019B960494DF}">
+              <a14:hiddenLine xmlns:a14="http://schemas.microsoft.com/office/drawing/2010/main" w="25400" cap="flat" cmpd="sng" algn="ctr">
+                <a:solidFill>
+                  <a:schemeClr val="accent1">
+                    <a:shade val="15000"/>
+                  </a:schemeClr>
+                </a:solidFill>
+                <a:prstDash val="solid"/>
+              </a14:hiddenLine>
+            </a:ext>
+          </a:extLst>
+        </p:spPr>
+        <p:style>
+          <a:lnRef idx="2">
+            <a:schemeClr val="accent1">
+              <a:shade val="15000"/>
+            </a:schemeClr>
+          </a:lnRef>
+          <a:fillRef idx="1">
+            <a:schemeClr val="accent1"/>
+          </a:fillRef>
+          <a:effectRef idx="0">
+            <a:schemeClr val="accent1"/>
+          </a:effectRef>
+          <a:fontRef idx="minor">
+            <a:schemeClr val="lt1"/>
+          </a:fontRef>
+        </p:style>
+        <p:txBody>
+          <a:bodyPr lIns="741155" tIns="259492" rIns="1852888" bIns="203886" rtlCol="0" anchor="ctr">
+            <a:normAutofit fontScale="85000" lnSpcReduction="10000"/>
+          </a:bodyPr>
+          <a:lstStyle/>
+          <a:p>
+            <a:r>
+              <a:rPr lang="en-US" sz="2600">
+                <a:solidFill>
+                  <a:srgbClr val="FFFFFF"/>
+                </a:solidFill>
+              </a:rPr>
+              <a:t>The </a:t>
+            </a:r>
+            <a:r>
+              <a:rPr lang="en-US" sz="2600">
+                <a:solidFill>
+                  <a:srgbClr val="FFFFFF"/>
+                </a:solidFill>
+                <a:hlinkClick r:id="rId7">
+                  <a:extLst>
+                    <a:ext uri="{A12FA001-AC4F-418D-AE19-62706E023703}">
+                      <ahyp:hlinkClr xmlns:ahyp="http://schemas.microsoft.com/office/drawing/2018/hyperlinkcolor" val="tx"/>
+                    </a:ext>
+                  </a:extLst>
+                </a:hlinkClick>
+              </a:rPr>
+              <a:t>Slido app</a:t>
+            </a:r>
+            <a:r>
+              <a:rPr lang="en-US" sz="2600">
+                <a:solidFill>
+                  <a:srgbClr val="FFFFFF"/>
+                </a:solidFill>
+              </a:rPr>
+              <a:t> must be installed on every computer you’re presenting from</a:t>
+            </a:r>
+          </a:p>
+        </p:txBody>
+      </p:sp>
+      <p:pic>
+        <p:nvPicPr>
+          <p:cNvPr id="6" name="Graphic 5">
+            <a:extLst>
+              <a:ext uri="{FF2B5EF4-FFF2-40B4-BE49-F238E27FC236}">
+                <a16:creationId xmlns:a16="http://schemas.microsoft.com/office/drawing/2014/main" id="{D468020E-BFBC-C1D8-39F5-F43B4F32CED2}"/>
+              </a:ext>
+            </a:extLst>
+          </p:cNvPr>
+          <p:cNvPicPr>
+            <a:picLocks/>
+          </p:cNvPicPr>
+          <p:nvPr/>
+        </p:nvPicPr>
+        <p:blipFill>
+          <a:blip r:embed="rId8">
+            <a:extLst>
+              <a:ext uri="{96DAC541-7B7A-43D3-8B79-37D633B846F1}">
+                <asvg:svgBlip xmlns:asvg="http://schemas.microsoft.com/office/drawing/2016/SVG/main" r:embed="rId9"/>
+              </a:ext>
+            </a:extLst>
+          </a:blip>
+          <a:stretch>
+            <a:fillRect/>
+          </a:stretch>
+        </p:blipFill>
+        <p:spPr>
+          <a:xfrm>
+            <a:off x="296462" y="6190785"/>
+            <a:ext cx="296462" cy="296462"/>
+          </a:xfrm>
+          <a:prstGeom prst="rect">
+            <a:avLst/>
+          </a:prstGeom>
+        </p:spPr>
+      </p:pic>
+      <p:sp>
+        <p:nvSpPr>
+          <p:cNvPr id="7" name="Trapezoid 6">
+            <a:extLst>
+              <a:ext uri="{FF2B5EF4-FFF2-40B4-BE49-F238E27FC236}">
+                <a16:creationId xmlns:a16="http://schemas.microsoft.com/office/drawing/2014/main" id="{85502F5C-B468-6778-75A6-545A7E749EB0}"/>
+              </a:ext>
+            </a:extLst>
+          </p:cNvPr>
+          <p:cNvSpPr/>
+          <p:nvPr/>
+        </p:nvSpPr>
+        <p:spPr>
+          <a:xfrm rot="2700000">
+            <a:off x="9620371" y="514924"/>
+            <a:ext cx="3335198" cy="778213"/>
+          </a:xfrm>
+          <a:prstGeom prst="trapezoid">
+            <a:avLst>
+              <a:gd name="adj" fmla="val 100000"/>
+            </a:avLst>
+          </a:prstGeom>
+          <a:solidFill>
+            <a:srgbClr val="EDFAF2"/>
+          </a:solidFill>
+          <a:ln w="25400" cap="flat" cmpd="sng" algn="ctr">
+            <a:noFill/>
+            <a:prstDash val="solid"/>
+          </a:ln>
+          <a:effectLst/>
+          <a:extLst>
+            <a:ext uri="{91240B29-F687-4F45-9708-019B960494DF}">
+              <a14:hiddenLine xmlns:a14="http://schemas.microsoft.com/office/drawing/2010/main" w="25400" cap="flat" cmpd="sng" algn="ctr">
+                <a:solidFill>
+                  <a:schemeClr val="accent1">
+                    <a:shade val="15000"/>
+                  </a:schemeClr>
+                </a:solidFill>
+                <a:prstDash val="solid"/>
+              </a14:hiddenLine>
+            </a:ext>
+          </a:extLst>
+        </p:spPr>
+        <p:style>
+          <a:lnRef idx="2">
+            <a:schemeClr val="accent1">
+              <a:shade val="15000"/>
+            </a:schemeClr>
+          </a:lnRef>
+          <a:fillRef idx="1">
+            <a:schemeClr val="accent1"/>
+          </a:fillRef>
+          <a:effectRef idx="0">
+            <a:schemeClr val="accent1"/>
+          </a:effectRef>
+          <a:fontRef idx="minor">
+            <a:schemeClr val="lt1"/>
+          </a:fontRef>
+        </p:style>
+        <p:txBody>
+          <a:bodyPr tIns="0" bIns="0" rtlCol="0" anchor="t">
+            <a:normAutofit fontScale="70000" lnSpcReduction="20000"/>
+          </a:bodyPr>
+          <a:lstStyle/>
+          <a:p>
+            <a:pPr algn="ctr"/>
+            <a:r>
+              <a:rPr lang="en-US" sz="2600" b="1">
+                <a:solidFill>
+                  <a:srgbClr val="198038"/>
+                </a:solidFill>
+              </a:rPr>
+              <a:t>Do not edit
+</a:t>
+            </a:r>
+            <a:r>
+              <a:rPr lang="en-US" sz="2200">
+                <a:solidFill>
+                  <a:srgbClr val="198038"/>
+                </a:solidFill>
+                <a:hlinkClick r:id="rId10">
+                  <a:extLst>
+                    <a:ext uri="{A12FA001-AC4F-418D-AE19-62706E023703}">
+                      <ahyp:hlinkClr xmlns:ahyp="http://schemas.microsoft.com/office/drawing/2018/hyperlinkcolor" val="tx"/>
+                    </a:ext>
+                  </a:extLst>
+                </a:hlinkClick>
+              </a:rPr>
+              <a:t>How to change the design</a:t>
+            </a:r>
+            <a:endParaRPr lang="en-US" sz="2200">
+              <a:solidFill>
+                <a:srgbClr val="198038"/>
+              </a:solidFill>
+            </a:endParaRPr>
+          </a:p>
+        </p:txBody>
+      </p:sp>
+      <p:pic>
+        <p:nvPicPr>
+          <p:cNvPr id="9" name="Graphic 8">
+            <a:extLst>
+              <a:ext uri="{FF2B5EF4-FFF2-40B4-BE49-F238E27FC236}">
+                <a16:creationId xmlns:a16="http://schemas.microsoft.com/office/drawing/2014/main" id="{6DCE1CC1-3C77-5CB3-DDC3-98309CA3E309}"/>
+              </a:ext>
+            </a:extLst>
+          </p:cNvPr>
+          <p:cNvPicPr>
+            <a:picLocks/>
+          </p:cNvPicPr>
+          <p:nvPr/>
+        </p:nvPicPr>
+        <p:blipFill>
+          <a:blip r:embed="rId11">
+            <a:extLst>
+              <a:ext uri="{96DAC541-7B7A-43D3-8B79-37D633B846F1}">
+                <asvg:svgBlip xmlns:asvg="http://schemas.microsoft.com/office/drawing/2016/SVG/main" r:embed="rId12"/>
+              </a:ext>
+            </a:extLst>
+          </a:blip>
+          <a:stretch>
+            <a:fillRect/>
+          </a:stretch>
+        </p:blipFill>
+        <p:spPr>
+          <a:xfrm>
+            <a:off x="10746748" y="6153727"/>
+            <a:ext cx="1111733" cy="370578"/>
+          </a:xfrm>
+          <a:prstGeom prst="rect">
+            <a:avLst/>
+          </a:prstGeom>
+        </p:spPr>
+      </p:pic>
     </p:spTree>
+    <p:custDataLst>
+      <p:tags r:id="rId1"/>
+    </p:custDataLst>
     <p:extLst>
       <p:ext uri="{BB962C8B-B14F-4D97-AF65-F5344CB8AC3E}">
-        <p14:creationId xmlns:p14="http://schemas.microsoft.com/office/powerpoint/2010/main" val="1582547232"/>
+        <p14:creationId xmlns:p14="http://schemas.microsoft.com/office/powerpoint/2010/main" val="367226158"/>
       </p:ext>
     </p:extLst>
   </p:cSld>
   <p:clrMapOvr>
     <a:masterClrMapping/>
   </p:clrMapOvr>
+  <p:timing>
+    <p:tnLst>
+      <p:par>
+        <p:cTn id="1" dur="indefinite" restart="never" nodeType="tmRoot">
+          <p:childTnLst>
+            <p:seq concurrent="1" nextAc="seek">
+              <p:cTn id="2" dur="indefinite" nodeType="mainSeq">
+                <p:childTnLst>
+                  <p:par>
+                    <p:cTn id="3" fill="hold">
+                      <p:stCondLst>
+                        <p:cond delay="indefinite"/>
+                      </p:stCondLst>
+                      <p:childTnLst>
+                        <p:par>
+                          <p:cTn id="4" fill="hold">
+                            <p:stCondLst>
+                              <p:cond delay="0"/>
+                            </p:stCondLst>
+                            <p:childTnLst>
+                              <p:par>
+                                <p:cTn id="5" presetID="26" presetClass="emph" presetSubtype="0" fill="hold" grpId="0" nodeType="clickEffect">
+                                  <p:stCondLst>
+                                    <p:cond delay="0"/>
+                                  </p:stCondLst>
+                                  <p:childTnLst>
+                                    <p:animEffect transition="out" filter="fade">
+                                      <p:cBhvr>
+                                        <p:cTn id="6" dur="50" tmFilter="0, 0; .2, .5; .8, .5; 1, 0"/>
+                                        <p:tgtEl>
+                                          <p:spTgt spid="3"/>
+                                        </p:tgtEl>
+                                      </p:cBhvr>
+                                    </p:animEffect>
+                                    <p:animScale>
+                                      <p:cBhvr>
+                                        <p:cTn id="7" dur="25" autoRev="1" fill="hold"/>
+                                        <p:tgtEl>
+                                          <p:spTgt spid="3"/>
+                                        </p:tgtEl>
+                                      </p:cBhvr>
+                                      <p:by x="105000" y="105000"/>
+                                    </p:animScale>
+                                  </p:childTnLst>
+                                </p:cTn>
+                              </p:par>
+                            </p:childTnLst>
+                          </p:cTn>
+                        </p:par>
+                      </p:childTnLst>
+                    </p:cTn>
+                  </p:par>
+                </p:childTnLst>
+              </p:cTn>
+              <p:prevCondLst>
+                <p:cond evt="onPrev" delay="0">
+                  <p:tgtEl>
+                    <p:sldTgt/>
+                  </p:tgtEl>
+                </p:cond>
+              </p:prevCondLst>
+              <p:nextCondLst>
+                <p:cond evt="onNext" delay="0">
+                  <p:tgtEl>
+                    <p:sldTgt/>
+                  </p:tgtEl>
+                </p:cond>
+              </p:nextCondLst>
+            </p:seq>
+          </p:childTnLst>
+        </p:cTn>
+      </p:par>
+    </p:tnLst>
+    <p:bldLst>
+      <p:bldP spid="3" grpId="0" animBg="1"/>
+    </p:bldLst>
+  </p:timing>
 </p:sld>
 </file>
 
-<file path=ppt/slides/slide4.xml><?xml version="1.0" encoding="utf-8"?>
-<p:sld xmlns:a="http://schemas.openxmlformats.org/drawingml/2006/main" xmlns:r="http://schemas.openxmlformats.org/officeDocument/2006/relationships" xmlns:p="http://schemas.openxmlformats.org/presentationml/2006/main">
+<file path=ppt/slides/slide5.xml><?xml version="1.0" encoding="utf-8"?>
+<p:sld xmlns:a="http://schemas.openxmlformats.org/drawingml/2006/main" xmlns:r="http://schemas.openxmlformats.org/officeDocument/2006/relationships" xmlns:p="http://schemas.openxmlformats.org/presentationml/2006/main" show="0">
   <p:cSld>
     <p:spTree>
       <p:nvGrpSpPr>
@@ -20661,7 +21015,7 @@
             </a:pPr>
             <a:r>
               <a:rPr lang="en-US" sz="4320" dirty="0"/>
-              <a:t>Last Time: Approaches to Model Explanations</a:t>
+              <a:t>Approaches to Model Explanations</a:t>
             </a:r>
             <a:endParaRPr dirty="0"/>
           </a:p>
@@ -20749,8 +21103,8 @@
 </p:sld>
 </file>
 
-<file path=ppt/slides/slide5.xml><?xml version="1.0" encoding="utf-8"?>
-<p:sld xmlns:a="http://schemas.openxmlformats.org/drawingml/2006/main" xmlns:r="http://schemas.openxmlformats.org/officeDocument/2006/relationships" xmlns:p="http://schemas.openxmlformats.org/presentationml/2006/main">
+<file path=ppt/slides/slide6.xml><?xml version="1.0" encoding="utf-8"?>
+<p:sld xmlns:a="http://schemas.openxmlformats.org/drawingml/2006/main" xmlns:r="http://schemas.openxmlformats.org/officeDocument/2006/relationships" xmlns:p="http://schemas.openxmlformats.org/presentationml/2006/main" show="0">
   <p:cSld>
     <p:spTree>
       <p:nvGrpSpPr>
@@ -21548,7 +21902,7 @@
 </p:sld>
 </file>
 
-<file path=ppt/slides/slide6.xml><?xml version="1.0" encoding="utf-8"?>
+<file path=ppt/slides/slide7.xml><?xml version="1.0" encoding="utf-8"?>
 <p:sld xmlns:a="http://schemas.openxmlformats.org/drawingml/2006/main" xmlns:r="http://schemas.openxmlformats.org/officeDocument/2006/relationships" xmlns:p="http://schemas.openxmlformats.org/presentationml/2006/main">
   <p:cSld>
     <p:spTree>
@@ -21826,7 +22180,7 @@
 </p:sld>
 </file>
 
-<file path=ppt/slides/slide7.xml><?xml version="1.0" encoding="utf-8"?>
+<file path=ppt/slides/slide8.xml><?xml version="1.0" encoding="utf-8"?>
 <p:sld xmlns:a="http://schemas.openxmlformats.org/drawingml/2006/main" xmlns:r="http://schemas.openxmlformats.org/officeDocument/2006/relationships" xmlns:p="http://schemas.openxmlformats.org/presentationml/2006/main">
   <p:cSld>
     <p:spTree>
@@ -21955,7 +22309,7 @@
 </p:sld>
 </file>
 
-<file path=ppt/slides/slide8.xml><?xml version="1.0" encoding="utf-8"?>
+<file path=ppt/slides/slide9.xml><?xml version="1.0" encoding="utf-8"?>
 <p:sld xmlns:a="http://schemas.openxmlformats.org/drawingml/2006/main" xmlns:r="http://schemas.openxmlformats.org/officeDocument/2006/relationships" xmlns:p="http://schemas.openxmlformats.org/presentationml/2006/main">
   <p:cSld>
     <p:spTree>
@@ -22071,10 +22425,9 @@
               <a:buChar char="●"/>
             </a:pPr>
             <a:r>
-              <a:rPr lang="en-US"/>
-              <a:t>Decision Trees</a:t>
+              <a:rPr lang="en-US" dirty="0"/>
+              <a:t>Logistic Regression</a:t>
             </a:r>
-            <a:endParaRPr/>
           </a:p>
           <a:p>
             <a:pPr marL="457200" lvl="0" indent="-381000" algn="l" rtl="0">
@@ -22094,10 +22447,9 @@
               <a:buChar char="●"/>
             </a:pPr>
             <a:r>
-              <a:rPr lang="en-US"/>
-              <a:t>KNN</a:t>
+              <a:rPr lang="en-US" dirty="0"/>
+              <a:t>Decision Trees</a:t>
             </a:r>
-            <a:endParaRPr/>
           </a:p>
           <a:p>
             <a:pPr marL="457200" lvl="0" indent="-381000" algn="l" rtl="0">
@@ -22117,10 +22469,9 @@
               <a:buChar char="●"/>
             </a:pPr>
             <a:r>
-              <a:rPr lang="en-US"/>
-              <a:t>SVMs</a:t>
+              <a:rPr lang="en-US" dirty="0"/>
+              <a:t>RFs</a:t>
             </a:r>
-            <a:endParaRPr/>
           </a:p>
           <a:p>
             <a:pPr marL="457200" lvl="0" indent="-381000" algn="l" rtl="0">
@@ -22140,10 +22491,10 @@
               <a:buChar char="●"/>
             </a:pPr>
             <a:r>
-              <a:rPr lang="en-US"/>
-              <a:t>RFs</a:t>
+              <a:rPr lang="en-US" dirty="0" err="1"/>
+              <a:t>XGBoost</a:t>
             </a:r>
-            <a:endParaRPr/>
+            <a:endParaRPr dirty="0"/>
           </a:p>
           <a:p>
             <a:pPr marL="457200" lvl="0" indent="-381000" algn="l" rtl="0">
@@ -22163,10 +22514,10 @@
               <a:buChar char="●"/>
             </a:pPr>
             <a:r>
-              <a:rPr lang="en-US"/>
+              <a:rPr lang="en-US" dirty="0"/>
               <a:t>NNs</a:t>
             </a:r>
-            <a:endParaRPr/>
+            <a:endParaRPr dirty="0"/>
           </a:p>
         </p:txBody>
       </p:sp>
@@ -22183,114 +22534,34 @@
 </p:sld>
 </file>
 
-<file path=ppt/slides/slide9.xml><?xml version="1.0" encoding="utf-8"?>
-<p:sld xmlns:a="http://schemas.openxmlformats.org/drawingml/2006/main" xmlns:r="http://schemas.openxmlformats.org/officeDocument/2006/relationships" xmlns:p="http://schemas.openxmlformats.org/presentationml/2006/main">
-  <p:cSld>
-    <p:spTree>
-      <p:nvGrpSpPr>
-        <p:cNvPr id="1" name="Shape 107"/>
-        <p:cNvGrpSpPr/>
-        <p:nvPr/>
-      </p:nvGrpSpPr>
-      <p:grpSpPr>
-        <a:xfrm>
-          <a:off x="0" y="0"/>
-          <a:ext cx="0" cy="0"/>
-          <a:chOff x="0" y="0"/>
-          <a:chExt cx="0" cy="0"/>
-        </a:xfrm>
-      </p:grpSpPr>
-      <p:sp>
-        <p:nvSpPr>
-          <p:cNvPr id="108" name="Google Shape;108;g71c382910d_0_0"/>
-          <p:cNvSpPr txBox="1">
-            <a:spLocks noGrp="1"/>
-          </p:cNvSpPr>
-          <p:nvPr>
-            <p:ph type="title"/>
-          </p:nvPr>
-        </p:nvSpPr>
-        <p:spPr>
-          <a:xfrm>
-            <a:off x="415600" y="86563"/>
-            <a:ext cx="11360700" cy="763500"/>
-          </a:xfrm>
-          <a:prstGeom prst="rect">
-            <a:avLst/>
-          </a:prstGeom>
-        </p:spPr>
-        <p:txBody>
-          <a:bodyPr spcFirstLastPara="1" wrap="square" lIns="121900" tIns="121900" rIns="121900" bIns="121900" anchor="t" anchorCtr="0">
-            <a:noAutofit/>
-          </a:bodyPr>
-          <a:lstStyle/>
-          <a:p>
-            <a:pPr marL="0" lvl="0" indent="0" algn="l" rtl="0">
-              <a:spcBef>
-                <a:spcPts val="0"/>
-              </a:spcBef>
-              <a:spcAft>
-                <a:spcPts val="0"/>
-              </a:spcAft>
-              <a:buNone/>
-            </a:pPr>
-            <a:r>
-              <a:rPr lang="en-US"/>
-              <a:t>Feature Importances</a:t>
-            </a:r>
-            <a:endParaRPr/>
-          </a:p>
-        </p:txBody>
-      </p:sp>
-      <p:sp>
-        <p:nvSpPr>
-          <p:cNvPr id="109" name="Google Shape;109;g71c382910d_0_0"/>
-          <p:cNvSpPr txBox="1">
-            <a:spLocks noGrp="1"/>
-          </p:cNvSpPr>
-          <p:nvPr>
-            <p:ph type="body" idx="1"/>
-          </p:nvPr>
-        </p:nvSpPr>
-        <p:spPr>
-          <a:xfrm>
-            <a:off x="415600" y="1536633"/>
-            <a:ext cx="11360700" cy="4555200"/>
-          </a:xfrm>
-          <a:prstGeom prst="rect">
-            <a:avLst/>
-          </a:prstGeom>
-        </p:spPr>
-        <p:txBody>
-          <a:bodyPr spcFirstLastPara="1" wrap="square" lIns="121900" tIns="121900" rIns="121900" bIns="121900" anchor="t" anchorCtr="0">
-            <a:noAutofit/>
-          </a:bodyPr>
-          <a:lstStyle/>
-          <a:p>
-            <a:pPr marL="0" lvl="0" indent="0" algn="l" rtl="0">
-              <a:spcBef>
-                <a:spcPts val="0"/>
-              </a:spcBef>
-              <a:spcAft>
-                <a:spcPts val="0"/>
-              </a:spcAft>
-              <a:buNone/>
-            </a:pPr>
-            <a:endParaRPr/>
-          </a:p>
-        </p:txBody>
-      </p:sp>
-    </p:spTree>
-    <p:extLst>
-      <p:ext uri="{BB962C8B-B14F-4D97-AF65-F5344CB8AC3E}">
-        <p14:creationId xmlns:p14="http://schemas.microsoft.com/office/powerpoint/2010/main" val="31147705"/>
-      </p:ext>
-    </p:extLst>
-  </p:cSld>
-  <p:clrMapOvr>
-    <a:masterClrMapping/>
-  </p:clrMapOvr>
-</p:sld>
+<file path=ppt/tags/tag1.xml><?xml version="1.0" encoding="utf-8"?>
+<p:tagLst xmlns:a="http://schemas.openxmlformats.org/drawingml/2006/main" xmlns:r="http://schemas.openxmlformats.org/officeDocument/2006/relationships" xmlns:p="http://schemas.openxmlformats.org/presentationml/2006/main">
+  <p:tag name="SLIDO_APP_VERSION" val="1.5.0.0"/>
+  <p:tag name="SLIDO_PRESENTATION_ID" val="096220cb-9513-413c-b63d-d03300087e95"/>
+  <p:tag name="SLIDO_EVENT_UUID" val="0161bee7-9b52-48ab-bd01-308fc07c8a33"/>
+  <p:tag name="SLIDO_EVENT_SECTION_UUID" val="53f7b2fd-9b37-4ce9-89ff-a9a7d9b782ad"/>
+</p:tagLst>
+</file>
+
+<file path=ppt/tags/tag2.xml><?xml version="1.0" encoding="utf-8"?>
+<p:tagLst xmlns:a="http://schemas.openxmlformats.org/drawingml/2006/main" xmlns:r="http://schemas.openxmlformats.org/officeDocument/2006/relationships" xmlns:p="http://schemas.openxmlformats.org/presentationml/2006/main">
+  <p:tag name="SLIDO_TYPE" val="SlidoPoll"/>
+  <p:tag name="SLIDO_POLL_UUID" val="13984146-5a47-473f-9e7b-7e1d158eba38"/>
+  <p:tag name="SLIDO_TIMELINE" val="W3sicG9sbFF1ZXN0aW9uVXVpZCI6Ijc4OTI2ZmJhLWU2MWEtNDE0YS04NGNiLWZiMmQxZWZjODgxMSIsInNob3dSZXN1bHRzIjpmYWxzZX0seyJwb2xsUXVlc3Rpb25VdWlkIjoiNzg5MjZmYmEtZTYxYS00MTRhLTg0Y2ItZmIyZDFlZmM4ODExIiwic2hvd1Jlc3VsdHMiOnRydWV9XQ=="/>
+</p:tagLst>
+</file>
+
+<file path=ppt/tags/tag3.xml><?xml version="1.0" encoding="utf-8"?>
+<p:tagLst xmlns:a="http://schemas.openxmlformats.org/drawingml/2006/main" xmlns:r="http://schemas.openxmlformats.org/officeDocument/2006/relationships" xmlns:p="http://schemas.openxmlformats.org/presentationml/2006/main">
+  <p:tag name="SLIDO_ELEMENT" val="interaction_image"/>
+  <p:tag name="INTERACTION_TYPE" val="OpenText"/>
+</p:tagLst>
+</file>
+
+<file path=ppt/tags/tag4.xml><?xml version="1.0" encoding="utf-8"?>
+<p:tagLst xmlns:a="http://schemas.openxmlformats.org/drawingml/2006/main" xmlns:r="http://schemas.openxmlformats.org/officeDocument/2006/relationships" xmlns:p="http://schemas.openxmlformats.org/presentationml/2006/main">
+  <p:tag name="SLIDO_ELEMENT" val="title"/>
+</p:tagLst>
 </file>
 
 <file path=ppt/theme/theme1.xml><?xml version="1.0" encoding="utf-8"?>
